--- a/slides/formaty-aktivnostey.pptx
+++ b/slides/formaty-aktivnostey.pptx
@@ -149,11 +149,11 @@
             <c:bubble3D val="0"/>
             <c:spPr>
               <a:solidFill>
-                <a:srgbClr val="00C2FF"/>
+                <a:srgbClr val="009FE3"/>
               </a:solidFill>
               <a:ln w="31750" cap="flat">
                 <a:solidFill>
-                  <a:srgbClr val="101A3D"/>
+                  <a:srgbClr val="FFFFFF"/>
                 </a:solidFill>
                 <a:prstDash val="solid"/>
                 <a:round/>
@@ -166,11 +166,11 @@
             <c:bubble3D val="0"/>
             <c:spPr>
               <a:solidFill>
-                <a:srgbClr val="F2A33C"/>
+                <a:srgbClr val="E8801F"/>
               </a:solidFill>
               <a:ln w="31750" cap="flat">
                 <a:solidFill>
-                  <a:srgbClr val="101A3D"/>
+                  <a:srgbClr val="FFFFFF"/>
                 </a:solidFill>
                 <a:prstDash val="solid"/>
                 <a:round/>
@@ -183,11 +183,11 @@
             <c:bubble3D val="0"/>
             <c:spPr>
               <a:solidFill>
-                <a:srgbClr val="4CD3A5"/>
+                <a:srgbClr val="17A673"/>
               </a:solidFill>
               <a:ln w="31750" cap="flat">
                 <a:solidFill>
-                  <a:srgbClr val="101A3D"/>
+                  <a:srgbClr val="FFFFFF"/>
                 </a:solidFill>
                 <a:prstDash val="solid"/>
                 <a:round/>
@@ -200,11 +200,11 @@
             <c:bubble3D val="0"/>
             <c:spPr>
               <a:solidFill>
-                <a:srgbClr val="6E8BE8"/>
+                <a:srgbClr val="4056B5"/>
               </a:solidFill>
               <a:ln w="31750" cap="flat">
                 <a:solidFill>
-                  <a:srgbClr val="101A3D"/>
+                  <a:srgbClr val="FFFFFF"/>
                 </a:solidFill>
                 <a:prstDash val="solid"/>
                 <a:round/>
@@ -217,11 +217,11 @@
             <c:bubble3D val="0"/>
             <c:spPr>
               <a:solidFill>
-                <a:srgbClr val="B07FE8"/>
+                <a:srgbClr val="8E44AD"/>
               </a:solidFill>
               <a:ln w="31750" cap="flat">
                 <a:solidFill>
-                  <a:srgbClr val="101A3D"/>
+                  <a:srgbClr val="FFFFFF"/>
                 </a:solidFill>
                 <a:prstDash val="solid"/>
                 <a:round/>
@@ -234,11 +234,11 @@
             <c:bubble3D val="0"/>
             <c:spPr>
               <a:solidFill>
-                <a:srgbClr val="7C8AC0"/>
+                <a:srgbClr val="5E6E96"/>
               </a:solidFill>
               <a:ln w="31750" cap="flat">
                 <a:solidFill>
-                  <a:srgbClr val="101A3D"/>
+                  <a:srgbClr val="FFFFFF"/>
                 </a:solidFill>
                 <a:prstDash val="solid"/>
                 <a:round/>
@@ -258,7 +258,7 @@
                   <a:pPr>
                     <a:defRPr sz="1200" b="1" i="0" u="none" strike="noStrike">
                       <a:solidFill>
-                        <a:srgbClr val="0E1733"/>
+                        <a:srgbClr val="FFFFFF"/>
                       </a:solidFill>
                       <a:latin typeface="Calibri"/>
                     </a:defRPr>
@@ -283,7 +283,7 @@
                   <a:pPr>
                     <a:defRPr sz="1200" b="1" i="0" u="none" strike="noStrike">
                       <a:solidFill>
-                        <a:srgbClr val="0E1733"/>
+                        <a:srgbClr val="FFFFFF"/>
                       </a:solidFill>
                       <a:latin typeface="Calibri"/>
                     </a:defRPr>
@@ -308,7 +308,7 @@
                   <a:pPr>
                     <a:defRPr sz="1200" b="1" i="0" u="none" strike="noStrike">
                       <a:solidFill>
-                        <a:srgbClr val="0E1733"/>
+                        <a:srgbClr val="FFFFFF"/>
                       </a:solidFill>
                       <a:latin typeface="Calibri"/>
                     </a:defRPr>
@@ -333,7 +333,7 @@
                   <a:pPr>
                     <a:defRPr sz="1200" b="1" i="0" u="none" strike="noStrike">
                       <a:solidFill>
-                        <a:srgbClr val="0E1733"/>
+                        <a:srgbClr val="FFFFFF"/>
                       </a:solidFill>
                       <a:latin typeface="Calibri"/>
                     </a:defRPr>
@@ -358,7 +358,7 @@
                   <a:pPr>
                     <a:defRPr sz="1200" b="1" i="0" u="none" strike="noStrike">
                       <a:solidFill>
-                        <a:srgbClr val="0E1733"/>
+                        <a:srgbClr val="FFFFFF"/>
                       </a:solidFill>
                       <a:latin typeface="Calibri"/>
                     </a:defRPr>
@@ -383,7 +383,7 @@
                   <a:pPr>
                     <a:defRPr sz="1200" b="1" i="0" u="none" strike="noStrike">
                       <a:solidFill>
-                        <a:srgbClr val="0E1733"/>
+                        <a:srgbClr val="FFFFFF"/>
                       </a:solidFill>
                       <a:latin typeface="Calibri"/>
                     </a:defRPr>
@@ -1250,7 +1250,7 @@
     <p:bg>
       <p:bgPr>
         <a:solidFill>
-          <a:srgbClr val="101A3D"/>
+          <a:srgbClr val="FFFFFF"/>
         </a:solidFill>
       </p:bgPr>
     </p:bg>
@@ -1295,7 +1295,7 @@
             <a:r>
               <a:rPr lang="en-US" sz="3400" b="1" dirty="0">
                 <a:solidFill>
-                  <a:srgbClr val="FFFFFF"/>
+                  <a:srgbClr val="14213D"/>
                 </a:solidFill>
                 <a:latin typeface="Calibri" pitchFamily="34" charset="0"/>
                 <a:ea typeface="Calibri" pitchFamily="34" charset="-122"/>
@@ -1334,7 +1334,7 @@
             <a:r>
               <a:rPr lang="en-US" sz="1450" dirty="0">
                 <a:solidFill>
-                  <a:srgbClr val="9AA6C9"/>
+                  <a:srgbClr val="6B7691"/>
                 </a:solidFill>
                 <a:latin typeface="Calibri" pitchFamily="34" charset="0"/>
                 <a:ea typeface="Calibri" pitchFamily="34" charset="-122"/>
@@ -1389,13 +1389,13 @@
             <a:r>
               <a:rPr lang="en-US" sz="3000" b="1" dirty="0">
                 <a:solidFill>
-                  <a:srgbClr val="FFFFFF"/>
-                </a:solidFill>
-                <a:latin typeface="Calibri" pitchFamily="34" charset="0"/>
-                <a:ea typeface="Calibri" pitchFamily="34" charset="-122"/>
-                <a:cs typeface="Calibri" pitchFamily="34" charset="-120"/>
-              </a:rPr>
-              <a:t>11 633</a:t>
+                  <a:srgbClr val="14213D"/>
+                </a:solidFill>
+                <a:latin typeface="Calibri" pitchFamily="34" charset="0"/>
+                <a:ea typeface="Calibri" pitchFamily="34" charset="-122"/>
+                <a:cs typeface="Calibri" pitchFamily="34" charset="-120"/>
+              </a:rPr>
+              <a:t>11 633</a:t>
             </a:r>
             <a:endParaRPr lang="en-US" sz="3000" dirty="0"/>
           </a:p>
@@ -1428,7 +1428,7 @@
             <a:r>
               <a:rPr lang="en-US" sz="1250" dirty="0">
                 <a:solidFill>
-                  <a:srgbClr val="9AA6C9"/>
+                  <a:srgbClr val="6B7691"/>
                 </a:solidFill>
                 <a:latin typeface="Calibri" pitchFamily="34" charset="0"/>
                 <a:ea typeface="Calibri" pitchFamily="34" charset="-122"/>
@@ -1455,7 +1455,7 @@
             <a:avLst/>
           </a:prstGeom>
           <a:solidFill>
-            <a:srgbClr val="00C2FF"/>
+            <a:srgbClr val="009FE3"/>
           </a:solidFill>
           <a:ln/>
         </p:spPr>
@@ -1487,7 +1487,7 @@
             <a:r>
               <a:rPr lang="en-US" sz="1500" b="1" dirty="0">
                 <a:solidFill>
-                  <a:srgbClr val="FFFFFF"/>
+                  <a:srgbClr val="1E2A47"/>
                 </a:solidFill>
                 <a:latin typeface="Calibri" pitchFamily="34" charset="0"/>
                 <a:ea typeface="Calibri" pitchFamily="34" charset="-122"/>
@@ -1526,13 +1526,13 @@
             <a:r>
               <a:rPr lang="en-US" sz="1500" b="1" dirty="0">
                 <a:solidFill>
-                  <a:srgbClr val="FFFFFF"/>
-                </a:solidFill>
-                <a:latin typeface="Calibri" pitchFamily="34" charset="0"/>
-                <a:ea typeface="Calibri" pitchFamily="34" charset="-122"/>
-                <a:cs typeface="Calibri" pitchFamily="34" charset="-120"/>
-              </a:rPr>
-              <a:t>3 548</a:t>
+                  <a:srgbClr val="1E2A47"/>
+                </a:solidFill>
+                <a:latin typeface="Calibri" pitchFamily="34" charset="0"/>
+                <a:ea typeface="Calibri" pitchFamily="34" charset="-122"/>
+                <a:cs typeface="Calibri" pitchFamily="34" charset="-120"/>
+              </a:rPr>
+              <a:t>3 548</a:t>
             </a:r>
             <a:pPr algn="r" indent="0" marL="0">
               <a:buNone/>
@@ -1540,7 +1540,7 @@
             <a:r>
               <a:rPr lang="en-US" sz="1500" b="1" dirty="0">
                 <a:solidFill>
-                  <a:srgbClr val="00C2FF"/>
+                  <a:srgbClr val="009FE3"/>
                 </a:solidFill>
                 <a:latin typeface="Calibri" pitchFamily="34" charset="0"/>
                 <a:ea typeface="Calibri" pitchFamily="34" charset="-122"/>
@@ -1579,7 +1579,7 @@
             <a:r>
               <a:rPr lang="en-US" sz="1150" dirty="0">
                 <a:solidFill>
-                  <a:srgbClr val="9AA6C9"/>
+                  <a:srgbClr val="5A6579"/>
                 </a:solidFill>
                 <a:latin typeface="Calibri" pitchFamily="34" charset="0"/>
                 <a:ea typeface="Calibri" pitchFamily="34" charset="-122"/>
@@ -1606,7 +1606,7 @@
             <a:avLst/>
           </a:prstGeom>
           <a:solidFill>
-            <a:srgbClr val="F2A33C"/>
+            <a:srgbClr val="E8801F"/>
           </a:solidFill>
           <a:ln/>
         </p:spPr>
@@ -1638,7 +1638,7 @@
             <a:r>
               <a:rPr lang="en-US" sz="1500" b="1" dirty="0">
                 <a:solidFill>
-                  <a:srgbClr val="FFFFFF"/>
+                  <a:srgbClr val="1E2A47"/>
                 </a:solidFill>
                 <a:latin typeface="Calibri" pitchFamily="34" charset="0"/>
                 <a:ea typeface="Calibri" pitchFamily="34" charset="-122"/>
@@ -1677,13 +1677,13 @@
             <a:r>
               <a:rPr lang="en-US" sz="1500" b="1" dirty="0">
                 <a:solidFill>
-                  <a:srgbClr val="FFFFFF"/>
-                </a:solidFill>
-                <a:latin typeface="Calibri" pitchFamily="34" charset="0"/>
-                <a:ea typeface="Calibri" pitchFamily="34" charset="-122"/>
-                <a:cs typeface="Calibri" pitchFamily="34" charset="-120"/>
-              </a:rPr>
-              <a:t>3 251</a:t>
+                  <a:srgbClr val="1E2A47"/>
+                </a:solidFill>
+                <a:latin typeface="Calibri" pitchFamily="34" charset="0"/>
+                <a:ea typeface="Calibri" pitchFamily="34" charset="-122"/>
+                <a:cs typeface="Calibri" pitchFamily="34" charset="-120"/>
+              </a:rPr>
+              <a:t>3 251</a:t>
             </a:r>
             <a:pPr algn="r" indent="0" marL="0">
               <a:buNone/>
@@ -1691,7 +1691,7 @@
             <a:r>
               <a:rPr lang="en-US" sz="1500" b="1" dirty="0">
                 <a:solidFill>
-                  <a:srgbClr val="F2A33C"/>
+                  <a:srgbClr val="E8801F"/>
                 </a:solidFill>
                 <a:latin typeface="Calibri" pitchFamily="34" charset="0"/>
                 <a:ea typeface="Calibri" pitchFamily="34" charset="-122"/>
@@ -1730,7 +1730,7 @@
             <a:r>
               <a:rPr lang="en-US" sz="1150" dirty="0">
                 <a:solidFill>
-                  <a:srgbClr val="9AA6C9"/>
+                  <a:srgbClr val="5A6579"/>
                 </a:solidFill>
                 <a:latin typeface="Calibri" pitchFamily="34" charset="0"/>
                 <a:ea typeface="Calibri" pitchFamily="34" charset="-122"/>
@@ -1757,7 +1757,7 @@
             <a:avLst/>
           </a:prstGeom>
           <a:solidFill>
-            <a:srgbClr val="4CD3A5"/>
+            <a:srgbClr val="17A673"/>
           </a:solidFill>
           <a:ln/>
         </p:spPr>
@@ -1789,7 +1789,7 @@
             <a:r>
               <a:rPr lang="en-US" sz="1500" b="1" dirty="0">
                 <a:solidFill>
-                  <a:srgbClr val="FFFFFF"/>
+                  <a:srgbClr val="1E2A47"/>
                 </a:solidFill>
                 <a:latin typeface="Calibri" pitchFamily="34" charset="0"/>
                 <a:ea typeface="Calibri" pitchFamily="34" charset="-122"/>
@@ -1828,13 +1828,13 @@
             <a:r>
               <a:rPr lang="en-US" sz="1500" b="1" dirty="0">
                 <a:solidFill>
-                  <a:srgbClr val="FFFFFF"/>
-                </a:solidFill>
-                <a:latin typeface="Calibri" pitchFamily="34" charset="0"/>
-                <a:ea typeface="Calibri" pitchFamily="34" charset="-122"/>
-                <a:cs typeface="Calibri" pitchFamily="34" charset="-120"/>
-              </a:rPr>
-              <a:t>1 769</a:t>
+                  <a:srgbClr val="1E2A47"/>
+                </a:solidFill>
+                <a:latin typeface="Calibri" pitchFamily="34" charset="0"/>
+                <a:ea typeface="Calibri" pitchFamily="34" charset="-122"/>
+                <a:cs typeface="Calibri" pitchFamily="34" charset="-120"/>
+              </a:rPr>
+              <a:t>1 769</a:t>
             </a:r>
             <a:pPr algn="r" indent="0" marL="0">
               <a:buNone/>
@@ -1842,7 +1842,7 @@
             <a:r>
               <a:rPr lang="en-US" sz="1500" b="1" dirty="0">
                 <a:solidFill>
-                  <a:srgbClr val="4CD3A5"/>
+                  <a:srgbClr val="17A673"/>
                 </a:solidFill>
                 <a:latin typeface="Calibri" pitchFamily="34" charset="0"/>
                 <a:ea typeface="Calibri" pitchFamily="34" charset="-122"/>
@@ -1881,7 +1881,7 @@
             <a:r>
               <a:rPr lang="en-US" sz="1150" dirty="0">
                 <a:solidFill>
-                  <a:srgbClr val="9AA6C9"/>
+                  <a:srgbClr val="5A6579"/>
                 </a:solidFill>
                 <a:latin typeface="Calibri" pitchFamily="34" charset="0"/>
                 <a:ea typeface="Calibri" pitchFamily="34" charset="-122"/>
@@ -1908,7 +1908,7 @@
             <a:avLst/>
           </a:prstGeom>
           <a:solidFill>
-            <a:srgbClr val="6E8BE8"/>
+            <a:srgbClr val="4056B5"/>
           </a:solidFill>
           <a:ln/>
         </p:spPr>
@@ -1940,7 +1940,7 @@
             <a:r>
               <a:rPr lang="en-US" sz="1500" b="1" dirty="0">
                 <a:solidFill>
-                  <a:srgbClr val="FFFFFF"/>
+                  <a:srgbClr val="1E2A47"/>
                 </a:solidFill>
                 <a:latin typeface="Calibri" pitchFamily="34" charset="0"/>
                 <a:ea typeface="Calibri" pitchFamily="34" charset="-122"/>
@@ -1979,13 +1979,13 @@
             <a:r>
               <a:rPr lang="en-US" sz="1500" b="1" dirty="0">
                 <a:solidFill>
-                  <a:srgbClr val="FFFFFF"/>
-                </a:solidFill>
-                <a:latin typeface="Calibri" pitchFamily="34" charset="0"/>
-                <a:ea typeface="Calibri" pitchFamily="34" charset="-122"/>
-                <a:cs typeface="Calibri" pitchFamily="34" charset="-120"/>
-              </a:rPr>
-              <a:t>1 481</a:t>
+                  <a:srgbClr val="1E2A47"/>
+                </a:solidFill>
+                <a:latin typeface="Calibri" pitchFamily="34" charset="0"/>
+                <a:ea typeface="Calibri" pitchFamily="34" charset="-122"/>
+                <a:cs typeface="Calibri" pitchFamily="34" charset="-120"/>
+              </a:rPr>
+              <a:t>1 481</a:t>
             </a:r>
             <a:pPr algn="r" indent="0" marL="0">
               <a:buNone/>
@@ -1993,7 +1993,7 @@
             <a:r>
               <a:rPr lang="en-US" sz="1500" b="1" dirty="0">
                 <a:solidFill>
-                  <a:srgbClr val="6E8BE8"/>
+                  <a:srgbClr val="4056B5"/>
                 </a:solidFill>
                 <a:latin typeface="Calibri" pitchFamily="34" charset="0"/>
                 <a:ea typeface="Calibri" pitchFamily="34" charset="-122"/>
@@ -2032,7 +2032,7 @@
             <a:r>
               <a:rPr lang="en-US" sz="1150" dirty="0">
                 <a:solidFill>
-                  <a:srgbClr val="9AA6C9"/>
+                  <a:srgbClr val="5A6579"/>
                 </a:solidFill>
                 <a:latin typeface="Calibri" pitchFamily="34" charset="0"/>
                 <a:ea typeface="Calibri" pitchFamily="34" charset="-122"/>
@@ -2059,7 +2059,7 @@
             <a:avLst/>
           </a:prstGeom>
           <a:solidFill>
-            <a:srgbClr val="B07FE8"/>
+            <a:srgbClr val="8E44AD"/>
           </a:solidFill>
           <a:ln/>
         </p:spPr>
@@ -2091,7 +2091,7 @@
             <a:r>
               <a:rPr lang="en-US" sz="1500" b="1" dirty="0">
                 <a:solidFill>
-                  <a:srgbClr val="FFFFFF"/>
+                  <a:srgbClr val="1E2A47"/>
                 </a:solidFill>
                 <a:latin typeface="Calibri" pitchFamily="34" charset="0"/>
                 <a:ea typeface="Calibri" pitchFamily="34" charset="-122"/>
@@ -2130,13 +2130,13 @@
             <a:r>
               <a:rPr lang="en-US" sz="1500" b="1" dirty="0">
                 <a:solidFill>
-                  <a:srgbClr val="FFFFFF"/>
-                </a:solidFill>
-                <a:latin typeface="Calibri" pitchFamily="34" charset="0"/>
-                <a:ea typeface="Calibri" pitchFamily="34" charset="-122"/>
-                <a:cs typeface="Calibri" pitchFamily="34" charset="-120"/>
-              </a:rPr>
-              <a:t>1 143</a:t>
+                  <a:srgbClr val="1E2A47"/>
+                </a:solidFill>
+                <a:latin typeface="Calibri" pitchFamily="34" charset="0"/>
+                <a:ea typeface="Calibri" pitchFamily="34" charset="-122"/>
+                <a:cs typeface="Calibri" pitchFamily="34" charset="-120"/>
+              </a:rPr>
+              <a:t>1 143</a:t>
             </a:r>
             <a:pPr algn="r" indent="0" marL="0">
               <a:buNone/>
@@ -2144,7 +2144,7 @@
             <a:r>
               <a:rPr lang="en-US" sz="1500" b="1" dirty="0">
                 <a:solidFill>
-                  <a:srgbClr val="B07FE8"/>
+                  <a:srgbClr val="8E44AD"/>
                 </a:solidFill>
                 <a:latin typeface="Calibri" pitchFamily="34" charset="0"/>
                 <a:ea typeface="Calibri" pitchFamily="34" charset="-122"/>
@@ -2183,7 +2183,7 @@
             <a:r>
               <a:rPr lang="en-US" sz="1150" dirty="0">
                 <a:solidFill>
-                  <a:srgbClr val="9AA6C9"/>
+                  <a:srgbClr val="5A6579"/>
                 </a:solidFill>
                 <a:latin typeface="Calibri" pitchFamily="34" charset="0"/>
                 <a:ea typeface="Calibri" pitchFamily="34" charset="-122"/>
@@ -2210,7 +2210,7 @@
             <a:avLst/>
           </a:prstGeom>
           <a:solidFill>
-            <a:srgbClr val="7C8AC0"/>
+            <a:srgbClr val="5E6E96"/>
           </a:solidFill>
           <a:ln/>
         </p:spPr>
@@ -2242,7 +2242,7 @@
             <a:r>
               <a:rPr lang="en-US" sz="1500" b="1" dirty="0">
                 <a:solidFill>
-                  <a:srgbClr val="FFFFFF"/>
+                  <a:srgbClr val="1E2A47"/>
                 </a:solidFill>
                 <a:latin typeface="Calibri" pitchFamily="34" charset="0"/>
                 <a:ea typeface="Calibri" pitchFamily="34" charset="-122"/>
@@ -2281,7 +2281,7 @@
             <a:r>
               <a:rPr lang="en-US" sz="1500" b="1" dirty="0">
                 <a:solidFill>
-                  <a:srgbClr val="FFFFFF"/>
+                  <a:srgbClr val="1E2A47"/>
                 </a:solidFill>
                 <a:latin typeface="Calibri" pitchFamily="34" charset="0"/>
                 <a:ea typeface="Calibri" pitchFamily="34" charset="-122"/>
@@ -2295,7 +2295,7 @@
             <a:r>
               <a:rPr lang="en-US" sz="1500" b="1" dirty="0">
                 <a:solidFill>
-                  <a:srgbClr val="7C8AC0"/>
+                  <a:srgbClr val="5E6E96"/>
                 </a:solidFill>
                 <a:latin typeface="Calibri" pitchFamily="34" charset="0"/>
                 <a:ea typeface="Calibri" pitchFamily="34" charset="-122"/>
@@ -2334,7 +2334,7 @@
             <a:r>
               <a:rPr lang="en-US" sz="1150" dirty="0">
                 <a:solidFill>
-                  <a:srgbClr val="9AA6C9"/>
+                  <a:srgbClr val="5A6579"/>
                 </a:solidFill>
                 <a:latin typeface="Calibri" pitchFamily="34" charset="0"/>
                 <a:ea typeface="Calibri" pitchFamily="34" charset="-122"/>
@@ -2363,7 +2363,7 @@
             </a:avLst>
           </a:prstGeom>
           <a:solidFill>
-            <a:srgbClr val="1A2A5C"/>
+            <a:srgbClr val="F1F4FA"/>
           </a:solidFill>
           <a:ln/>
         </p:spPr>
@@ -2395,7 +2395,7 @@
             <a:r>
               <a:rPr lang="en-US" sz="1300" b="1" dirty="0">
                 <a:solidFill>
-                  <a:srgbClr val="00C2FF"/>
+                  <a:srgbClr val="0B7FC2"/>
                 </a:solidFill>
                 <a:latin typeface="Calibri" pitchFamily="34" charset="0"/>
                 <a:ea typeface="Calibri" pitchFamily="34" charset="-122"/>
@@ -2409,7 +2409,7 @@
             <a:r>
               <a:rPr lang="en-US" sz="1300" dirty="0">
                 <a:solidFill>
-                  <a:srgbClr val="D6DDF2"/>
+                  <a:srgbClr val="1E2A47"/>
                 </a:solidFill>
                 <a:latin typeface="Calibri" pitchFamily="34" charset="0"/>
                 <a:ea typeface="Calibri" pitchFamily="34" charset="-122"/>
